--- a/reports/slides/C150_discussion.pptx
+++ b/reports/slides/C150_discussion.pptx
@@ -26,6 +26,14 @@
     <p:sldId id="274" r:id="rId26"/>
     <p:sldId id="275" r:id="rId27"/>
     <p:sldId id="276" r:id="rId28"/>
+    <p:sldId id="277" r:id="rId29"/>
+    <p:sldId id="278" r:id="rId30"/>
+    <p:sldId id="279" r:id="rId31"/>
+    <p:sldId id="280" r:id="rId32"/>
+    <p:sldId id="281" r:id="rId33"/>
+    <p:sldId id="282" r:id="rId34"/>
+    <p:sldId id="283" r:id="rId35"/>
+    <p:sldId id="284" r:id="rId36"/>
   </p:sldIdLst>
   <p:sldSz cx="12191695" cy="6858000" type="screen4x3"/>
   <p:notesSz cx="6858000" cy="9144000"/>
@@ -7955,6 +7963,2246 @@
             <a:r>
               <a:rPr sz="1400" b="0"/>
               <a:t>full test suite: 403 tests</a:t>
+            </a:r>
+          </a:p>
+        </p:txBody>
+      </p:sp>
+    </p:spTree>
+  </p:cSld>
+  <p:clrMapOvr>
+    <a:masterClrMapping/>
+  </p:clrMapOvr>
+</p:sld>
+</file>
+
+<file path=ppt/slides/slide22.xml><?xml version="1.0" encoding="utf-8"?>
+<p:sld xmlns:a="http://schemas.openxmlformats.org/drawingml/2006/main" xmlns:p="http://schemas.openxmlformats.org/presentationml/2006/main" xmlns:r="http://schemas.openxmlformats.org/officeDocument/2006/relationships">
+  <p:cSld>
+    <p:spTree>
+      <p:nvGrpSpPr>
+        <p:cNvPr id="1" name=""/>
+        <p:cNvGrpSpPr/>
+        <p:nvPr/>
+      </p:nvGrpSpPr>
+      <p:grpSpPr/>
+      <p:sp>
+        <p:nvSpPr>
+          <p:cNvPr id="2" name="Title 1"/>
+          <p:cNvSpPr>
+            <a:spLocks noGrp="1"/>
+          </p:cNvSpPr>
+          <p:nvPr>
+            <p:ph type="title"/>
+          </p:nvPr>
+        </p:nvSpPr>
+        <p:spPr/>
+        <p:txBody>
+          <a:bodyPr/>
+          <a:lstStyle/>
+          <a:p>
+            <a:r>
+              <a:rPr sz="2600"/>
+              <a:t>A Tier-2 view — C150 as an open system</a:t>
+            </a:r>
+          </a:p>
+        </p:txBody>
+      </p:sp>
+      <p:sp>
+        <p:nvSpPr>
+          <p:cNvPr id="3" name="Content Placeholder 2"/>
+          <p:cNvSpPr>
+            <a:spLocks noGrp="1"/>
+          </p:cNvSpPr>
+          <p:nvPr>
+            <p:ph idx="1"/>
+          </p:nvPr>
+        </p:nvSpPr>
+        <p:spPr>
+          <a:xfrm>
+            <a:off x="548640" y="1417320"/>
+            <a:ext cx="11064240" cy="5029200"/>
+          </a:xfrm>
+        </p:spPr>
+        <p:txBody>
+          <a:bodyPr wrap="square"/>
+          <a:lstStyle/>
+          <a:p>
+            <a:pPr/>
+            <a:r>
+              <a:rPr sz="1800" b="0"/>
+              <a:t>Tier 2 studies the full 256-rule family as CHANNELS: each neighbour pattern carries I, V (Hadamard), D (reset to 0) or E (reset to 1)</a:t>
+            </a:r>
+          </a:p>
+          <a:p>
+            <a:pPr lvl="1"/>
+            <a:r>
+              <a:rPr sz="1600" b="0"/>
+              <a:t>C150 = (I, V, V, I) is one of the 16 unitary members — the D/E-free corner</a:t>
+            </a:r>
+          </a:p>
+          <a:p>
+            <a:pPr/>
+            <a:r>
+              <a:rPr sz="1800" b="1"/>
+              <a:t>Three questions the sector graph cannot answer, and the channel formalism can</a:t>
+            </a:r>
+          </a:p>
+          <a:p>
+            <a:pPr lvl="1"/>
+            <a:r>
+              <a:rPr sz="1600" b="0"/>
+              <a:t>how large is the algebra of conserved operators?  (slide 20's first open item)</a:t>
+            </a:r>
+          </a:p>
+          <a:p>
+            <a:pPr lvl="1"/>
+            <a:r>
+              <a:rPr sz="1600" b="0"/>
+              <a:t>what survives when the rule is made dissipative — are the sectors fragile?</a:t>
+            </a:r>
+          </a:p>
+          <a:p>
+            <a:pPr lvl="1"/>
+            <a:r>
+              <a:rPr sz="1600" b="0"/>
+              <a:t>is the protected coherence a decoherence-free subspace, i.e. usable as a code?</a:t>
+            </a:r>
+          </a:p>
+          <a:p>
+            <a:pPr/>
+            <a:r>
+              <a:rPr sz="1800" b="1"/>
+              <a:t>Everything below is an INDEPENDENT re-derivation</a:t>
+            </a:r>
+          </a:p>
+          <a:p>
+            <a:pPr lvl="1"/>
+            <a:r>
+              <a:rPr sz="1600" b="0"/>
+              <a:t>separate repository, separate engine (sector_analysis_tier2); obc0 throughout</a:t>
+            </a:r>
+          </a:p>
+          <a:p>
+            <a:pPr lvl="1"/>
+            <a:r>
+              <a:rPr sz="1600" b="0"/>
+              <a:t>marked results are exact over ℚ(√2) — rational Gaussian elimination, no eigensolver, no tolerance</a:t>
+            </a:r>
+          </a:p>
+          <a:p>
+            <a:pPr lvl="1"/>
+            <a:r>
+              <a:rPr sz="1600" b="0"/>
+              <a:t>first cross-check: the Tier-2 SCC code reproduces #sectors = ⌊(N+1)/2⌋+1 for N = 3…12, and the pbc counts, with no shared code</a:t>
+            </a:r>
+          </a:p>
+        </p:txBody>
+      </p:sp>
+    </p:spTree>
+  </p:cSld>
+  <p:clrMapOvr>
+    <a:masterClrMapping/>
+  </p:clrMapOvr>
+</p:sld>
+</file>
+
+<file path=ppt/slides/slide23.xml><?xml version="1.0" encoding="utf-8"?>
+<p:sld xmlns:a="http://schemas.openxmlformats.org/drawingml/2006/main" xmlns:p="http://schemas.openxmlformats.org/presentationml/2006/main" xmlns:r="http://schemas.openxmlformats.org/officeDocument/2006/relationships">
+  <p:cSld>
+    <p:spTree>
+      <p:nvGrpSpPr>
+        <p:cNvPr id="1" name=""/>
+        <p:cNvGrpSpPr/>
+        <p:nvPr/>
+      </p:nvGrpSpPr>
+      <p:grpSpPr/>
+      <p:sp>
+        <p:nvSpPr>
+          <p:cNvPr id="2" name="Title 1"/>
+          <p:cNvSpPr>
+            <a:spLocks noGrp="1"/>
+          </p:cNvSpPr>
+          <p:nvPr>
+            <p:ph type="title"/>
+          </p:nvPr>
+        </p:nvSpPr>
+        <p:spPr/>
+        <p:txBody>
+          <a:bodyPr/>
+          <a:lstStyle/>
+          <a:p>
+            <a:r>
+              <a:rPr sz="2600"/>
+              <a:t>Dictionary — sectors ↔ open-system language</a:t>
+            </a:r>
+          </a:p>
+        </p:txBody>
+      </p:sp>
+      <p:graphicFrame>
+        <p:nvGraphicFramePr>
+          <p:cNvPr id="3" name="Table 2"/>
+          <p:cNvGraphicFramePr>
+            <a:graphicFrameLocks noGrp="1"/>
+          </p:cNvGraphicFramePr>
+          <p:nvPr/>
+        </p:nvGraphicFramePr>
+        <p:xfrm>
+          <a:off x="548640" y="1554480"/>
+          <a:ext cx="11064240" cy="2624328"/>
+        </p:xfrm>
+        <a:graphic>
+          <a:graphicData uri="http://schemas.openxmlformats.org/drawingml/2006/table">
+            <a:tbl>
+              <a:tblPr firstRow="1" bandRow="1">
+                <a:tableStyleId>{5C22544A-7EE6-4342-B048-85BDC9FD1C3A}</a:tableStyleId>
+              </a:tblPr>
+              <a:tblGrid>
+                <a:gridCol w="2766060"/>
+                <a:gridCol w="4610100"/>
+                <a:gridCol w="3688080"/>
+              </a:tblGrid>
+              <a:tr h="328041">
+                <a:tc>
+                  <a:txBody>
+                    <a:bodyPr/>
+                    <a:lstStyle/>
+                    <a:p>
+                      <a:r>
+                        <a:rPr sz="1200" b="1"/>
+                        <a:t>Tier 1 (unitary)</a:t>
+                      </a:r>
+                    </a:p>
+                  </a:txBody>
+                  <a:tcPr/>
+                </a:tc>
+                <a:tc>
+                  <a:txBody>
+                    <a:bodyPr/>
+                    <a:lstStyle/>
+                    <a:p>
+                      <a:r>
+                        <a:rPr sz="1200" b="1"/>
+                        <a:t>Tier 2 (channel Φ)</a:t>
+                      </a:r>
+                    </a:p>
+                  </a:txBody>
+                  <a:tcPr/>
+                </a:tc>
+                <a:tc>
+                  <a:txBody>
+                    <a:bodyPr/>
+                    <a:lstStyle/>
+                    <a:p>
+                      <a:r>
+                        <a:rPr sz="1200" b="1"/>
+                        <a:t>C150, obc0</a:t>
+                      </a:r>
+                    </a:p>
+                  </a:txBody>
+                  <a:tcPr/>
+                </a:tc>
+              </a:tr>
+              <a:tr h="328041">
+                <a:tc>
+                  <a:txBody>
+                    <a:bodyPr/>
+                    <a:lstStyle/>
+                    <a:p>
+                      <a:r>
+                        <a:rPr sz="1200" b="0"/>
+                        <a:t>Krylov sector</a:t>
+                      </a:r>
+                    </a:p>
+                  </a:txBody>
+                  <a:tcPr/>
+                </a:tc>
+                <a:tc>
+                  <a:txBody>
+                    <a:bodyPr/>
+                    <a:lstStyle/>
+                    <a:p>
+                      <a:r>
+                        <a:rPr sz="1200" b="0"/>
+                        <a:t>terminal SCC of the support graph</a:t>
+                      </a:r>
+                    </a:p>
+                  </a:txBody>
+                  <a:tcPr/>
+                </a:tc>
+                <a:tc>
+                  <a:txBody>
+                    <a:bodyPr/>
+                    <a:lstStyle/>
+                    <a:p>
+                      <a:r>
+                        <a:rPr sz="1200" b="0"/>
+                        <a:t>every SCC is terminal</a:t>
+                      </a:r>
+                    </a:p>
+                  </a:txBody>
+                  <a:tcPr/>
+                </a:tc>
+              </a:tr>
+              <a:tr h="328041">
+                <a:tc>
+                  <a:txBody>
+                    <a:bodyPr/>
+                    <a:lstStyle/>
+                    <a:p>
+                      <a:r>
+                        <a:rPr sz="1200" b="0"/>
+                        <a:t>— (no counterpart)</a:t>
+                      </a:r>
+                    </a:p>
+                  </a:txBody>
+                  <a:tcPr/>
+                </a:tc>
+                <a:tc>
+                  <a:txBody>
+                    <a:bodyPr/>
+                    <a:lstStyle/>
+                    <a:p>
+                      <a:r>
+                        <a:rPr sz="1200" b="0"/>
+                        <a:t>transient SCCs → condensation DAG</a:t>
+                      </a:r>
+                    </a:p>
+                  </a:txBody>
+                  <a:tcPr/>
+                </a:tc>
+                <a:tc>
+                  <a:txBody>
+                    <a:bodyPr/>
+                    <a:lstStyle/>
+                    <a:p>
+                      <a:r>
+                        <a:rPr sz="1200" b="0"/>
+                        <a:t>EMPTY: the DAG has no edges</a:t>
+                      </a:r>
+                    </a:p>
+                  </a:txBody>
+                  <a:tcPr/>
+                </a:tc>
+              </a:tr>
+              <a:tr h="328041">
+                <a:tc>
+                  <a:txBody>
+                    <a:bodyPr/>
+                    <a:lstStyle/>
+                    <a:p>
+                      <a:r>
+                        <a:rPr sz="1200" b="0"/>
+                        <a:t>#sectors</a:t>
+                      </a:r>
+                    </a:p>
+                  </a:txBody>
+                  <a:tcPr/>
+                </a:tc>
+                <a:tc>
+                  <a:txBody>
+                    <a:bodyPr/>
+                    <a:lstStyle/>
+                    <a:p>
+                      <a:r>
+                        <a:rPr sz="1200" b="0"/>
+                        <a:t>n_recurrent</a:t>
+                      </a:r>
+                    </a:p>
+                  </a:txBody>
+                  <a:tcPr/>
+                </a:tc>
+                <a:tc>
+                  <a:txBody>
+                    <a:bodyPr/>
+                    <a:lstStyle/>
+                    <a:p>
+                      <a:r>
+                        <a:rPr sz="1200" b="0"/>
+                        <a:t>⌊(N+1)/2⌋ + 1</a:t>
+                      </a:r>
+                    </a:p>
+                  </a:txBody>
+                  <a:tcPr/>
+                </a:tc>
+              </a:tr>
+              <a:tr h="328041">
+                <a:tc>
+                  <a:txBody>
+                    <a:bodyPr/>
+                    <a:lstStyle/>
+                    <a:p>
+                      <a:r>
+                        <a:rPr sz="1200" b="0"/>
+                        <a:t>Fix(U)</a:t>
+                      </a:r>
+                    </a:p>
+                  </a:txBody>
+                  <a:tcPr/>
+                </a:tc>
+                <a:tc>
+                  <a:txBody>
+                    <a:bodyPr/>
+                    <a:lstStyle/>
+                    <a:p>
+                      <a:r>
+                        <a:rPr sz="1200" b="0"/>
+                        <a:t>λ = 1 eigenspace of Φ</a:t>
+                      </a:r>
+                    </a:p>
+                  </a:txBody>
+                  <a:tcPr/>
+                </a:tc>
+                <a:tc>
+                  <a:txBody>
+                    <a:bodyPr/>
+                    <a:lstStyle/>
+                    <a:p>
+                      <a:r>
+                        <a:rPr sz="1200" b="0"/>
+                        <a:t>dim 2^m,  m = ⌈N/2⌉</a:t>
+                      </a:r>
+                    </a:p>
+                  </a:txBody>
+                  <a:tcPr/>
+                </a:tc>
+              </a:tr>
+              <a:tr h="328041">
+                <a:tc>
+                  <a:txBody>
+                    <a:bodyPr/>
+                    <a:lstStyle/>
+                    <a:p>
+                      <a:r>
+                        <a:rPr sz="1200" b="0"/>
+                        <a:t>commutant of U</a:t>
+                      </a:r>
+                    </a:p>
+                  </a:txBody>
+                  <a:tcPr/>
+                </a:tc>
+                <a:tc>
+                  <a:txBody>
+                    <a:bodyPr/>
+                    <a:lstStyle/>
+                    <a:p>
+                      <a:r>
+                        <a:rPr sz="1200" b="0"/>
+                        <a:t>fixed-point algebra; dim = Σ m_λ² = Cesàro rank</a:t>
+                      </a:r>
+                    </a:p>
+                  </a:txBody>
+                  <a:tcPr/>
+                </a:tc>
+                <a:tc>
+                  <a:txBody>
+                    <a:bodyPr/>
+                    <a:lstStyle/>
+                    <a:p>
+                      <a:r>
+                        <a:rPr sz="1200" b="0"/>
+                        <a:t>6^m  (new — see next slide)</a:t>
+                      </a:r>
+                    </a:p>
+                  </a:txBody>
+                  <a:tcPr/>
+                </a:tc>
+              </a:tr>
+              <a:tr h="328041">
+                <a:tc>
+                  <a:txBody>
+                    <a:bodyPr/>
+                    <a:lstStyle/>
+                    <a:p>
+                      <a:r>
+                        <a:rPr sz="1200" b="0"/>
+                        <a:t>spectral degeneracy</a:t>
+                      </a:r>
+                    </a:p>
+                  </a:txBody>
+                  <a:tcPr/>
+                </a:tc>
+                <a:tc>
+                  <a:txBody>
+                    <a:bodyPr/>
+                    <a:lstStyle/>
+                    <a:p>
+                      <a:r>
+                        <a:rPr sz="1200" b="0"/>
+                        <a:t>protected coherence: gap = Σ m_λ² − n_recurrent</a:t>
+                      </a:r>
+                    </a:p>
+                  </a:txBody>
+                  <a:tcPr/>
+                </a:tc>
+                <a:tc>
+                  <a:txBody>
+                    <a:bodyPr/>
+                    <a:lstStyle/>
+                    <a:p>
+                      <a:r>
+                        <a:rPr sz="1200" b="0"/>
+                        <a:t>33 at N = 4;  6^m − ⌊(N+1)/2⌋ − 1</a:t>
+                      </a:r>
+                    </a:p>
+                  </a:txBody>
+                  <a:tcPr/>
+                </a:tc>
+              </a:tr>
+              <a:tr h="328041">
+                <a:tc>
+                  <a:txBody>
+                    <a:bodyPr/>
+                    <a:lstStyle/>
+                    <a:p>
+                      <a:r>
+                        <a:rPr sz="1200" b="0"/>
+                        <a:t>— (no counterpart)</a:t>
+                      </a:r>
+                    </a:p>
+                  </a:txBody>
+                  <a:tcPr/>
+                </a:tc>
+                <a:tc>
+                  <a:txBody>
+                    <a:bodyPr/>
+                    <a:lstStyle/>
+                    <a:p>
+                      <a:r>
+                        <a:rPr sz="1200" b="0"/>
+                        <a:t>transient dark states (R-T11)</a:t>
+                      </a:r>
+                    </a:p>
+                  </a:txBody>
+                  <a:tcPr/>
+                </a:tc>
+                <a:tc>
+                  <a:txBody>
+                    <a:bodyPr/>
+                    <a:lstStyle/>
+                    <a:p>
+                      <a:r>
+                        <a:rPr sz="1200" b="0"/>
+                        <a:t>none — there is no transient region</a:t>
+                      </a:r>
+                    </a:p>
+                  </a:txBody>
+                  <a:tcPr/>
+                </a:tc>
+              </a:tr>
+            </a:tbl>
+          </a:graphicData>
+        </a:graphic>
+      </p:graphicFrame>
+      <p:sp>
+        <p:nvSpPr>
+          <p:cNvPr id="4" name="TextBox 3"/>
+          <p:cNvSpPr txBox="1"/>
+          <p:nvPr/>
+        </p:nvSpPr>
+        <p:spPr>
+          <a:xfrm>
+            <a:off x="548640" y="6035040"/>
+            <a:ext cx="11064240" cy="640080"/>
+          </a:xfrm>
+          <a:prstGeom prst="rect">
+            <a:avLst/>
+          </a:prstGeom>
+          <a:noFill/>
+        </p:spPr>
+        <p:txBody>
+          <a:bodyPr wrap="square">
+            <a:spAutoFit/>
+          </a:bodyPr>
+          <a:lstStyle/>
+          <a:p>
+            <a:r>
+              <a:rPr sz="1200"/>
+              <a:t>C150 is the degenerate case of the Tier-2 machinery: a channel with no transient region at all. That is exactly why every attractor question for it collapses to a question about the spectrum of U.</a:t>
+            </a:r>
+          </a:p>
+        </p:txBody>
+      </p:sp>
+    </p:spTree>
+  </p:cSld>
+  <p:clrMapOvr>
+    <a:masterClrMapping/>
+  </p:clrMapOvr>
+</p:sld>
+</file>
+
+<file path=ppt/slides/slide24.xml><?xml version="1.0" encoding="utf-8"?>
+<p:sld xmlns:a="http://schemas.openxmlformats.org/drawingml/2006/main" xmlns:p="http://schemas.openxmlformats.org/presentationml/2006/main" xmlns:r="http://schemas.openxmlformats.org/officeDocument/2006/relationships">
+  <p:cSld>
+    <p:spTree>
+      <p:nvGrpSpPr>
+        <p:cNvPr id="1" name=""/>
+        <p:cNvGrpSpPr/>
+        <p:nvPr/>
+      </p:nvGrpSpPr>
+      <p:grpSpPr/>
+      <p:sp>
+        <p:nvSpPr>
+          <p:cNvPr id="2" name="Title 1"/>
+          <p:cNvSpPr>
+            <a:spLocks noGrp="1"/>
+          </p:cNvSpPr>
+          <p:nvPr>
+            <p:ph type="title"/>
+          </p:nvPr>
+        </p:nvSpPr>
+        <p:spPr/>
+        <p:txBody>
+          <a:bodyPr/>
+          <a:lstStyle/>
+          <a:p>
+            <a:r>
+              <a:rPr sz="2600"/>
+              <a:t>Open item closed (1) — the commutant</a:t>
+            </a:r>
+          </a:p>
+        </p:txBody>
+      </p:sp>
+      <p:sp>
+        <p:nvSpPr>
+          <p:cNvPr id="3" name="Content Placeholder 2"/>
+          <p:cNvSpPr>
+            <a:spLocks noGrp="1"/>
+          </p:cNvSpPr>
+          <p:nvPr>
+            <p:ph idx="1"/>
+          </p:nvPr>
+        </p:nvSpPr>
+        <p:spPr>
+          <a:xfrm>
+            <a:off x="548640" y="1417320"/>
+            <a:ext cx="11064240" cy="5029200"/>
+          </a:xfrm>
+        </p:spPr>
+        <p:txBody>
+          <a:bodyPr wrap="square"/>
+          <a:lstStyle/>
+          <a:p>
+            <a:pPr/>
+            <a:r>
+              <a:rPr sz="1800" b="1"/>
+              <a:t>The commutant of U is the fixed-point algebra of the channel: dim = Σ_λ m_λ² = the Cesàro rank</a:t>
+            </a:r>
+          </a:p>
+          <a:p>
+            <a:pPr lvl="1"/>
+            <a:r>
+              <a:rPr sz="1600" b="0"/>
+              <a:t>measured from the exact multiplicities, N = 3…11, and matched to a formula</a:t>
+            </a:r>
+          </a:p>
+          <a:p>
+            <a:pPr/>
+            <a:r>
+              <a:rPr sz="1800" b="1"/>
+              <a:t>dim C(U) = 6^m for even N,  (6^m + 2^m)/2 for odd N,   m = ⌈N/2⌉</a:t>
+            </a:r>
+          </a:p>
+          <a:p>
+            <a:pPr lvl="1"/>
+            <a:r>
+              <a:rPr sz="1600" b="0"/>
+              <a:t>N = 3…11:  20, 36, 112, 216, 656, 1296, 3904, 7776, 23360 — exact, no fit</a:t>
+            </a:r>
+          </a:p>
+          <a:p>
+            <a:pPr lvl="1"/>
+            <a:r>
+              <a:rPr sz="1600" b="0"/>
+              <a:t>independently confirmed over ℚ(√2) at N = 4:  dim ker(L − 1) = 36 = 6² — tolerance-free, no eigensolver</a:t>
+            </a:r>
+          </a:p>
+          <a:p>
+            <a:pPr/>
+            <a:r>
+              <a:rPr sz="1800" b="1"/>
+              <a:t>Growth (√6)^N = 2.449^N — far above the 2^N of the Hilbert space</a:t>
+            </a:r>
+          </a:p>
+          <a:p>
+            <a:pPr lvl="1"/>
+            <a:r>
+              <a:rPr sz="1600" b="0"/>
+              <a:t>the naive Cauchy–Schwarz floor from the 3^m law alone is only 4^N/3^m = 2.309^N, so the degeneracy is even more structured than the count implies</a:t>
+            </a:r>
+          </a:p>
+          <a:p>
+            <a:pPr lvl="1"/>
+            <a:r>
+              <a:rPr sz="1600" b="0"/>
+              <a:t>only ⌊(N+1)/2⌋+1 of those dimensions are diagonal (the wall charge) — the commutant is overwhelmingly OFF-diagonal</a:t>
+            </a:r>
+          </a:p>
+          <a:p>
+            <a:pPr/>
+            <a:r>
+              <a:rPr sz="1800" b="1"/>
+              <a:t>Protected coherence:  gap = 6^m − ⌊(N+1)/2⌋ − 1</a:t>
+            </a:r>
+          </a:p>
+          <a:p>
+            <a:pPr lvl="1"/>
+            <a:r>
+              <a:rPr sz="1600" b="0"/>
+              <a:t>33 at N = 4, 212 at N = 6, 1291 at N = 8, 46 649 at N = 12</a:t>
+            </a:r>
+          </a:p>
+        </p:txBody>
+      </p:sp>
+    </p:spTree>
+  </p:cSld>
+  <p:clrMapOvr>
+    <a:masterClrMapping/>
+  </p:clrMapOvr>
+</p:sld>
+</file>
+
+<file path=ppt/slides/slide25.xml><?xml version="1.0" encoding="utf-8"?>
+<p:sld xmlns:a="http://schemas.openxmlformats.org/drawingml/2006/main" xmlns:p="http://schemas.openxmlformats.org/presentationml/2006/main" xmlns:r="http://schemas.openxmlformats.org/officeDocument/2006/relationships">
+  <p:cSld>
+    <p:spTree>
+      <p:nvGrpSpPr>
+        <p:cNvPr id="1" name=""/>
+        <p:cNvGrpSpPr/>
+        <p:nvPr/>
+      </p:nvGrpSpPr>
+      <p:grpSpPr/>
+      <p:sp>
+        <p:nvSpPr>
+          <p:cNvPr id="2" name="Title 1"/>
+          <p:cNvSpPr>
+            <a:spLocks noGrp="1"/>
+          </p:cNvSpPr>
+          <p:nvPr>
+            <p:ph type="title"/>
+          </p:nvPr>
+        </p:nvSpPr>
+        <p:spPr/>
+        <p:txBody>
+          <a:bodyPr/>
+          <a:lstStyle/>
+          <a:p>
+            <a:r>
+              <a:rPr sz="2600"/>
+              <a:t>Open item closed (2) — the full spectrum</a:t>
+            </a:r>
+          </a:p>
+        </p:txBody>
+      </p:sp>
+      <p:sp>
+        <p:nvSpPr>
+          <p:cNvPr id="3" name="Content Placeholder 2"/>
+          <p:cNvSpPr>
+            <a:spLocks noGrp="1"/>
+          </p:cNvSpPr>
+          <p:nvPr>
+            <p:ph idx="1"/>
+          </p:nvPr>
+        </p:nvSpPr>
+        <p:spPr>
+          <a:xfrm>
+            <a:off x="548640" y="1417320"/>
+            <a:ext cx="11064240" cy="5029200"/>
+          </a:xfrm>
+        </p:spPr>
+        <p:txBody>
+          <a:bodyPr wrap="square"/>
+          <a:lstStyle/>
+          <a:p>
+            <a:pPr/>
+            <a:r>
+              <a:rPr sz="1800" b="1"/>
+              <a:t>Spectral factorisation (obc0).  m = ⌈N/2⌉;  M(N) = m × m tridiagonal, off-diagonal ¼, diagonal ½, with</a:t>
+            </a:r>
+          </a:p>
+          <a:p>
+            <a:pPr lvl="1"/>
+            <a:r>
+              <a:rPr sz="1600" b="0"/>
+              <a:t>M₀₀ = 1/√2 − ¼  (all N)   and   M_(m−1,m−1) = ¾  (odd N only)</a:t>
+            </a:r>
+          </a:p>
+          <a:p>
+            <a:pPr lvl="1"/>
+            <a:r>
+              <a:rPr sz="1600" b="0"/>
+              <a:t>cos φ_i = eigenvalues of M(N)</a:t>
+            </a:r>
+          </a:p>
+          <a:p>
+            <a:pPr lvl="1"/>
+            <a:r>
+              <a:rPr sz="1600" b="0"/>
+              <a:t>spec(U) = { Σ_i ε_i φ_i },  ε ∈ {−1, 0, +1}^m,  multiplicity 2^#{ε_i = 0}</a:t>
+            </a:r>
+          </a:p>
+          <a:p>
+            <a:pPr lvl="1"/>
+            <a:r>
+              <a:rPr sz="1600" b="0"/>
+              <a:t>odd N: only sign patterns with an EVEN number of non-zero ε occur</a:t>
+            </a:r>
+          </a:p>
+          <a:p>
+            <a:pPr/>
+            <a:r>
+              <a:rPr sz="1800" b="0"/>
+              <a:t>Equivalently, for even N a quantisation condition:  sin((m+1)k) = (2√2 − 3)·sin(mk),  cos φ = cos²(k/2)</a:t>
+            </a:r>
+          </a:p>
+          <a:p>
+            <a:pPr lvl="1"/>
+            <a:r>
+              <a:rPr sz="1600" b="0"/>
+              <a:t>the boundary defect 2√2 − 3 = −(√2 − 1)² is the obc0 edge; the ¾ is a second defect at the far end, present only for odd N</a:t>
+            </a:r>
+          </a:p>
+          <a:p>
+            <a:pPr/>
+            <a:r>
+              <a:rPr sz="1800" b="1"/>
+              <a:t>Verified N = 2…12 against the engine</a:t>
+            </a:r>
+          </a:p>
+          <a:p>
+            <a:pPr lvl="1"/>
+            <a:r>
+              <a:rPr sz="1600" b="0"/>
+              <a:t>all 729 distinct eigenphases at N = 12 reproduced from SIX numbers: max phase error 5×10⁻⁹, multiplicities exact</a:t>
+            </a:r>
+          </a:p>
+          <a:p>
+            <a:pPr lvl="1"/>
+            <a:r>
+              <a:rPr sz="1600" b="0"/>
+              <a:t>it DERIVES the three laws that were stated separately: #distinct = 3^m (the all-patterns count), dim Fix(U) = 2^m (the all-zero pattern), and dim Fix(U_w) = C(m, w/2) (that pattern's split over wall shells)</a:t>
+            </a:r>
+          </a:p>
+        </p:txBody>
+      </p:sp>
+    </p:spTree>
+  </p:cSld>
+  <p:clrMapOvr>
+    <a:masterClrMapping/>
+  </p:clrMapOvr>
+</p:sld>
+</file>
+
+<file path=ppt/slides/slide26.xml><?xml version="1.0" encoding="utf-8"?>
+<p:sld xmlns:a="http://schemas.openxmlformats.org/drawingml/2006/main" xmlns:p="http://schemas.openxmlformats.org/presentationml/2006/main" xmlns:r="http://schemas.openxmlformats.org/officeDocument/2006/relationships">
+  <p:cSld>
+    <p:spTree>
+      <p:nvGrpSpPr>
+        <p:cNvPr id="1" name=""/>
+        <p:cNvGrpSpPr/>
+        <p:nvPr/>
+      </p:nvGrpSpPr>
+      <p:grpSpPr/>
+      <p:sp>
+        <p:nvSpPr>
+          <p:cNvPr id="2" name="Title 1"/>
+          <p:cNvSpPr>
+            <a:spLocks noGrp="1"/>
+          </p:cNvSpPr>
+          <p:nvPr>
+            <p:ph type="title"/>
+          </p:nvPr>
+        </p:nvSpPr>
+        <p:spPr/>
+        <p:txBody>
+          <a:bodyPr/>
+          <a:lstStyle/>
+          <a:p>
+            <a:r>
+              <a:rPr sz="2600"/>
+              <a:t>Is C150 free after all?  The two tests differ</a:t>
+            </a:r>
+          </a:p>
+        </p:txBody>
+      </p:sp>
+      <p:sp>
+        <p:nvSpPr>
+          <p:cNvPr id="3" name="Content Placeholder 2"/>
+          <p:cNvSpPr>
+            <a:spLocks noGrp="1"/>
+          </p:cNvSpPr>
+          <p:nvPr>
+            <p:ph idx="1"/>
+          </p:nvPr>
+        </p:nvSpPr>
+        <p:spPr>
+          <a:xfrm>
+            <a:off x="548640" y="1417320"/>
+            <a:ext cx="11064240" cy="5029200"/>
+          </a:xfrm>
+        </p:spPr>
+        <p:txBody>
+          <a:bodyPr wrap="square"/>
+          <a:lstStyle/>
+          <a:p>
+            <a:pPr/>
+            <a:r>
+              <a:rPr sz="1800" b="1"/>
+              <a:t>The tension, stated plainly</a:t>
+            </a:r>
+          </a:p>
+          <a:p>
+            <a:pPr lvl="1"/>
+            <a:r>
+              <a:rPr sz="1600" b="0"/>
+              <a:t>Result 4a: C150 is NOT free.  This law: the spectrum factorises over ⌈N/2⌉ modes, which is what a free model does.</a:t>
+            </a:r>
+          </a:p>
+          <a:p>
+            <a:pPr/>
+            <a:r>
+              <a:rPr sz="1800" b="1"/>
+              <a:t>Resolution — they test different freeness</a:t>
+            </a:r>
+          </a:p>
+          <a:p>
+            <a:pPr lvl="1"/>
+            <a:r>
+              <a:rPr sz="1600" b="0"/>
+              <a:t>Result 4a asks whether the w-wall block is the w-th antisymmetric power of the ONE-wall block: free, NUMBER-CONSERVING walls.  That is refuted, and stands.</a:t>
+            </a:r>
+          </a:p>
+          <a:p>
+            <a:pPr lvl="1"/>
+            <a:r>
+              <a:rPr sz="1600" b="0"/>
+              <a:t>this law's modes are not wall occupations: each carries ε ∈ {−1, 0, +1} (a ± pair), and there are ⌈N/2⌉ of them, not N+1</a:t>
+            </a:r>
+          </a:p>
+          <a:p>
+            <a:pPr lvl="1"/>
+            <a:r>
+              <a:rPr sz="1600" b="0"/>
+              <a:t>direct evidence: the w = 2 shell at N = 6 (21 states) contains 0-mode, 1-mode AND 2-mode phases — 3 + 6 + 12 — so mode number ≠ wall number</a:t>
+            </a:r>
+          </a:p>
+          <a:p>
+            <a:pPr/>
+            <a:r>
+              <a:rPr sz="1800" b="1"/>
+              <a:t>Honest summary</a:t>
+            </a:r>
+          </a:p>
+          <a:p>
+            <a:pPr lvl="1"/>
+            <a:r>
+              <a:rPr sz="1600" b="0"/>
+              <a:t>C150 is not a free wall gas, but its Floquet spectrum is exactly that of ⌈N/2⌉ particle–hole-paired modes — spectral freeness without wall-number freeness</a:t>
+            </a:r>
+          </a:p>
+          <a:p>
+            <a:pPr lvl="1"/>
+            <a:r>
+              <a:rPr sz="1600" b="0"/>
+              <a:t>that is what makes the degeneracy structural rather than accidental, and it is the mechanism behind Result 4c's RMT exclusion</a:t>
+            </a:r>
+          </a:p>
+          <a:p>
+            <a:pPr lvl="1"/>
+            <a:r>
+              <a:rPr sz="1600" b="0"/>
+              <a:t>open: exhibit the mode operators. They generate the commutant, and a 4-level block {φ, 0, 0, −φ} per mode gives 6^m immediately</a:t>
+            </a:r>
+          </a:p>
+        </p:txBody>
+      </p:sp>
+    </p:spTree>
+  </p:cSld>
+  <p:clrMapOvr>
+    <a:masterClrMapping/>
+  </p:clrMapOvr>
+</p:sld>
+</file>
+
+<file path=ppt/slides/slide27.xml><?xml version="1.0" encoding="utf-8"?>
+<p:sld xmlns:a="http://schemas.openxmlformats.org/drawingml/2006/main" xmlns:p="http://schemas.openxmlformats.org/presentationml/2006/main" xmlns:r="http://schemas.openxmlformats.org/officeDocument/2006/relationships">
+  <p:cSld>
+    <p:spTree>
+      <p:nvGrpSpPr>
+        <p:cNvPr id="1" name=""/>
+        <p:cNvGrpSpPr/>
+        <p:nvPr/>
+      </p:nvGrpSpPr>
+      <p:grpSpPr/>
+      <p:sp>
+        <p:nvSpPr>
+          <p:cNvPr id="2" name="Title 1"/>
+          <p:cNvSpPr>
+            <a:spLocks noGrp="1"/>
+          </p:cNvSpPr>
+          <p:nvPr>
+            <p:ph type="title"/>
+          </p:nvPr>
+        </p:nvSpPr>
+        <p:spPr/>
+        <p:txBody>
+          <a:bodyPr/>
+          <a:lstStyle/>
+          <a:p>
+            <a:r>
+              <a:rPr sz="2600"/>
+              <a:t>C150 under dissipation — the neighbours</a:t>
+            </a:r>
+          </a:p>
+        </p:txBody>
+      </p:sp>
+      <p:graphicFrame>
+        <p:nvGraphicFramePr>
+          <p:cNvPr id="3" name="Table 2"/>
+          <p:cNvGraphicFramePr>
+            <a:graphicFrameLocks noGrp="1"/>
+          </p:cNvGraphicFramePr>
+          <p:nvPr/>
+        </p:nvGraphicFramePr>
+        <p:xfrm>
+          <a:off x="548640" y="1554480"/>
+          <a:ext cx="11064237" cy="3280410"/>
+        </p:xfrm>
+        <a:graphic>
+          <a:graphicData uri="http://schemas.openxmlformats.org/drawingml/2006/table">
+            <a:tbl>
+              <a:tblPr firstRow="1" bandRow="1">
+                <a:tableStyleId>{5C22544A-7EE6-4342-B048-85BDC9FD1C3A}</a:tableStyleId>
+              </a:tblPr>
+              <a:tblGrid>
+                <a:gridCol w="813547"/>
+                <a:gridCol w="1952512"/>
+                <a:gridCol w="1789803"/>
+                <a:gridCol w="1464384"/>
+                <a:gridCol w="813547"/>
+                <a:gridCol w="1464384"/>
+                <a:gridCol w="2766060"/>
+              </a:tblGrid>
+              <a:tr h="328041">
+                <a:tc>
+                  <a:txBody>
+                    <a:bodyPr/>
+                    <a:lstStyle/>
+                    <a:p>
+                      <a:r>
+                        <a:rPr sz="1100" b="1"/>
+                        <a:t>rule</a:t>
+                      </a:r>
+                    </a:p>
+                  </a:txBody>
+                  <a:tcPr/>
+                </a:tc>
+                <a:tc>
+                  <a:txBody>
+                    <a:bodyPr/>
+                    <a:lstStyle/>
+                    <a:p>
+                      <a:r>
+                        <a:rPr sz="1100" b="1"/>
+                        <a:t>tuple</a:t>
+                      </a:r>
+                    </a:p>
+                  </a:txBody>
+                  <a:tcPr/>
+                </a:tc>
+                <a:tc>
+                  <a:txBody>
+                    <a:bodyPr/>
+                    <a:lstStyle/>
+                    <a:p>
+                      <a:r>
+                        <a:rPr sz="1100" b="1"/>
+                        <a:t>recurrent classes</a:t>
+                      </a:r>
+                    </a:p>
+                  </a:txBody>
+                  <a:tcPr/>
+                </a:tc>
+                <a:tc>
+                  <a:txBody>
+                    <a:bodyPr/>
+                    <a:lstStyle/>
+                    <a:p>
+                      <a:r>
+                        <a:rPr sz="1100" b="1"/>
+                        <a:t>Cesàro rank</a:t>
+                      </a:r>
+                    </a:p>
+                  </a:txBody>
+                  <a:tcPr/>
+                </a:tc>
+                <a:tc>
+                  <a:txBody>
+                    <a:bodyPr/>
+                    <a:lstStyle/>
+                    <a:p>
+                      <a:r>
+                        <a:rPr sz="1100" b="1"/>
+                        <a:t>gap</a:t>
+                      </a:r>
+                    </a:p>
+                  </a:txBody>
+                  <a:tcPr/>
+                </a:tc>
+                <a:tc>
+                  <a:txBody>
+                    <a:bodyPr/>
+                    <a:lstStyle/>
+                    <a:p>
+                      <a:r>
+                        <a:rPr sz="1100" b="1"/>
+                        <a:t>transient dark</a:t>
+                      </a:r>
+                    </a:p>
+                  </a:txBody>
+                  <a:tcPr/>
+                </a:tc>
+                <a:tc>
+                  <a:txBody>
+                    <a:bodyPr/>
+                    <a:lstStyle/>
+                    <a:p>
+                      <a:r>
+                        <a:rPr sz="1100" b="1"/>
+                        <a:t>reading</a:t>
+                      </a:r>
+                    </a:p>
+                  </a:txBody>
+                  <a:tcPr/>
+                </a:tc>
+              </a:tr>
+              <a:tr h="328041">
+                <a:tc>
+                  <a:txBody>
+                    <a:bodyPr/>
+                    <a:lstStyle/>
+                    <a:p>
+                      <a:r>
+                        <a:rPr sz="1100" b="0"/>
+                        <a:t>150</a:t>
+                      </a:r>
+                    </a:p>
+                  </a:txBody>
+                  <a:tcPr/>
+                </a:tc>
+                <a:tc>
+                  <a:txBody>
+                    <a:bodyPr/>
+                    <a:lstStyle/>
+                    <a:p>
+                      <a:r>
+                        <a:rPr sz="1100" b="0"/>
+                        <a:t>(I, V, V, I)</a:t>
+                      </a:r>
+                    </a:p>
+                  </a:txBody>
+                  <a:tcPr/>
+                </a:tc>
+                <a:tc>
+                  <a:txBody>
+                    <a:bodyPr/>
+                    <a:lstStyle/>
+                    <a:p>
+                      <a:r>
+                        <a:rPr sz="1100" b="0"/>
+                        <a:t>3</a:t>
+                      </a:r>
+                    </a:p>
+                  </a:txBody>
+                  <a:tcPr/>
+                </a:tc>
+                <a:tc>
+                  <a:txBody>
+                    <a:bodyPr/>
+                    <a:lstStyle/>
+                    <a:p>
+                      <a:r>
+                        <a:rPr sz="1100" b="0"/>
+                        <a:t>36</a:t>
+                      </a:r>
+                    </a:p>
+                  </a:txBody>
+                  <a:tcPr/>
+                </a:tc>
+                <a:tc>
+                  <a:txBody>
+                    <a:bodyPr/>
+                    <a:lstStyle/>
+                    <a:p>
+                      <a:r>
+                        <a:rPr sz="1100" b="0"/>
+                        <a:t>33</a:t>
+                      </a:r>
+                    </a:p>
+                  </a:txBody>
+                  <a:tcPr/>
+                </a:tc>
+                <a:tc>
+                  <a:txBody>
+                    <a:bodyPr/>
+                    <a:lstStyle/>
+                    <a:p>
+                      <a:r>
+                        <a:rPr sz="1100" b="0"/>
+                        <a:t>—</a:t>
+                      </a:r>
+                    </a:p>
+                  </a:txBody>
+                  <a:tcPr/>
+                </a:tc>
+                <a:tc>
+                  <a:txBody>
+                    <a:bodyPr/>
+                    <a:lstStyle/>
+                    <a:p>
+                      <a:r>
+                        <a:rPr sz="1100" b="0"/>
+                        <a:t>C150 itself</a:t>
+                      </a:r>
+                    </a:p>
+                  </a:txBody>
+                  <a:tcPr/>
+                </a:tc>
+              </a:tr>
+              <a:tr h="328041">
+                <a:tc>
+                  <a:txBody>
+                    <a:bodyPr/>
+                    <a:lstStyle/>
+                    <a:p>
+                      <a:r>
+                        <a:rPr sz="1100" b="0"/>
+                        <a:t>146</a:t>
+                      </a:r>
+                    </a:p>
+                  </a:txBody>
+                  <a:tcPr/>
+                </a:tc>
+                <a:tc>
+                  <a:txBody>
+                    <a:bodyPr/>
+                    <a:lstStyle/>
+                    <a:p>
+                      <a:r>
+                        <a:rPr sz="1100" b="0"/>
+                        <a:t>(D, V, V, I)</a:t>
+                      </a:r>
+                    </a:p>
+                  </a:txBody>
+                  <a:tcPr/>
+                </a:tc>
+                <a:tc>
+                  <a:txBody>
+                    <a:bodyPr/>
+                    <a:lstStyle/>
+                    <a:p>
+                      <a:r>
+                        <a:rPr sz="1100" b="0"/>
+                        <a:t>1</a:t>
+                      </a:r>
+                    </a:p>
+                  </a:txBody>
+                  <a:tcPr/>
+                </a:tc>
+                <a:tc>
+                  <a:txBody>
+                    <a:bodyPr/>
+                    <a:lstStyle/>
+                    <a:p>
+                      <a:r>
+                        <a:rPr sz="1100" b="0"/>
+                        <a:t>1</a:t>
+                      </a:r>
+                    </a:p>
+                  </a:txBody>
+                  <a:tcPr/>
+                </a:tc>
+                <a:tc>
+                  <a:txBody>
+                    <a:bodyPr/>
+                    <a:lstStyle/>
+                    <a:p>
+                      <a:r>
+                        <a:rPr sz="1100" b="0"/>
+                        <a:t>0</a:t>
+                      </a:r>
+                    </a:p>
+                  </a:txBody>
+                  <a:tcPr/>
+                </a:tc>
+                <a:tc>
+                  <a:txBody>
+                    <a:bodyPr/>
+                    <a:lstStyle/>
+                    <a:p>
+                      <a:r>
+                        <a:rPr sz="1100" b="0"/>
+                        <a:t>0</a:t>
+                      </a:r>
+                    </a:p>
+                  </a:txBody>
+                  <a:tcPr/>
+                </a:tc>
+                <a:tc>
+                  <a:txBody>
+                    <a:bodyPr/>
+                    <a:lstStyle/>
+                    <a:p>
+                      <a:r>
+                        <a:rPr sz="1100" b="0"/>
+                        <a:t>total collapse, no coherence</a:t>
+                      </a:r>
+                    </a:p>
+                  </a:txBody>
+                  <a:tcPr/>
+                </a:tc>
+              </a:tr>
+              <a:tr h="328041">
+                <a:tc>
+                  <a:txBody>
+                    <a:bodyPr/>
+                    <a:lstStyle/>
+                    <a:p>
+                      <a:r>
+                        <a:rPr sz="1100" b="0"/>
+                        <a:t>151</a:t>
+                      </a:r>
+                    </a:p>
+                  </a:txBody>
+                  <a:tcPr/>
+                </a:tc>
+                <a:tc>
+                  <a:txBody>
+                    <a:bodyPr/>
+                    <a:lstStyle/>
+                    <a:p>
+                      <a:r>
+                        <a:rPr sz="1100" b="0"/>
+                        <a:t>(E, V, V, I)</a:t>
+                      </a:r>
+                    </a:p>
+                  </a:txBody>
+                  <a:tcPr/>
+                </a:tc>
+                <a:tc>
+                  <a:txBody>
+                    <a:bodyPr/>
+                    <a:lstStyle/>
+                    <a:p>
+                      <a:r>
+                        <a:rPr sz="1100" b="0"/>
+                        <a:t>1</a:t>
+                      </a:r>
+                    </a:p>
+                  </a:txBody>
+                  <a:tcPr/>
+                </a:tc>
+                <a:tc>
+                  <a:txBody>
+                    <a:bodyPr/>
+                    <a:lstStyle/>
+                    <a:p>
+                      <a:r>
+                        <a:rPr sz="1100" b="0"/>
+                        <a:t>5</a:t>
+                      </a:r>
+                    </a:p>
+                  </a:txBody>
+                  <a:tcPr/>
+                </a:tc>
+                <a:tc>
+                  <a:txBody>
+                    <a:bodyPr/>
+                    <a:lstStyle/>
+                    <a:p>
+                      <a:r>
+                        <a:rPr sz="1100" b="0"/>
+                        <a:t>4</a:t>
+                      </a:r>
+                    </a:p>
+                  </a:txBody>
+                  <a:tcPr/>
+                </a:tc>
+                <a:tc>
+                  <a:txBody>
+                    <a:bodyPr/>
+                    <a:lstStyle/>
+                    <a:p>
+                      <a:r>
+                        <a:rPr sz="1100" b="0"/>
+                        <a:t>0</a:t>
+                      </a:r>
+                    </a:p>
+                  </a:txBody>
+                  <a:tcPr/>
+                </a:tc>
+                <a:tc>
+                  <a:txBody>
+                    <a:bodyPr/>
+                    <a:lstStyle/>
+                    <a:p>
+                      <a:r>
+                        <a:rPr sz="1100" b="0"/>
+                        <a:t>one 5-state class: period-3 QLC</a:t>
+                      </a:r>
+                    </a:p>
+                  </a:txBody>
+                  <a:tcPr/>
+                </a:tc>
+              </a:tr>
+              <a:tr h="328041">
+                <a:tc>
+                  <a:txBody>
+                    <a:bodyPr/>
+                    <a:lstStyle/>
+                    <a:p>
+                      <a:r>
+                        <a:rPr sz="1100" b="0"/>
+                        <a:t>148</a:t>
+                      </a:r>
+                    </a:p>
+                  </a:txBody>
+                  <a:tcPr/>
+                </a:tc>
+                <a:tc>
+                  <a:txBody>
+                    <a:bodyPr/>
+                    <a:lstStyle/>
+                    <a:p>
+                      <a:r>
+                        <a:rPr sz="1100" b="0"/>
+                        <a:t>(I, D, V, I)</a:t>
+                      </a:r>
+                    </a:p>
+                  </a:txBody>
+                  <a:tcPr/>
+                </a:tc>
+                <a:tc>
+                  <a:txBody>
+                    <a:bodyPr/>
+                    <a:lstStyle/>
+                    <a:p>
+                      <a:r>
+                        <a:rPr sz="1100" b="0"/>
+                        <a:t>3</a:t>
+                      </a:r>
+                    </a:p>
+                  </a:txBody>
+                  <a:tcPr/>
+                </a:tc>
+                <a:tc>
+                  <a:txBody>
+                    <a:bodyPr/>
+                    <a:lstStyle/>
+                    <a:p>
+                      <a:r>
+                        <a:rPr sz="1100" b="0"/>
+                        <a:t>9</a:t>
+                      </a:r>
+                    </a:p>
+                  </a:txBody>
+                  <a:tcPr/>
+                </a:tc>
+                <a:tc>
+                  <a:txBody>
+                    <a:bodyPr/>
+                    <a:lstStyle/>
+                    <a:p>
+                      <a:r>
+                        <a:rPr sz="1100" b="0"/>
+                        <a:t>6</a:t>
+                      </a:r>
+                    </a:p>
+                  </a:txBody>
+                  <a:tcPr/>
+                </a:tc>
+                <a:tc>
+                  <a:txBody>
+                    <a:bodyPr/>
+                    <a:lstStyle/>
+                    <a:p>
+                      <a:r>
+                        <a:rPr sz="1100" b="0"/>
+                        <a:t>0</a:t>
+                      </a:r>
+                    </a:p>
+                  </a:txBody>
+                  <a:tcPr/>
+                </a:tc>
+                <a:tc>
+                  <a:txBody>
+                    <a:bodyPr/>
+                    <a:lstStyle/>
+                    <a:p>
+                      <a:r>
+                        <a:rPr sz="1100" b="0"/>
+                        <a:t>3-dim DFS = 3 sectors</a:t>
+                      </a:r>
+                    </a:p>
+                  </a:txBody>
+                  <a:tcPr/>
+                </a:tc>
+              </a:tr>
+              <a:tr h="328041">
+                <a:tc>
+                  <a:txBody>
+                    <a:bodyPr/>
+                    <a:lstStyle/>
+                    <a:p>
+                      <a:r>
+                        <a:rPr sz="1100" b="0"/>
+                        <a:t>134</a:t>
+                      </a:r>
+                    </a:p>
+                  </a:txBody>
+                  <a:tcPr/>
+                </a:tc>
+                <a:tc>
+                  <a:txBody>
+                    <a:bodyPr/>
+                    <a:lstStyle/>
+                    <a:p>
+                      <a:r>
+                        <a:rPr sz="1100" b="0"/>
+                        <a:t>(I, V, D, I)</a:t>
+                      </a:r>
+                    </a:p>
+                  </a:txBody>
+                  <a:tcPr/>
+                </a:tc>
+                <a:tc>
+                  <a:txBody>
+                    <a:bodyPr/>
+                    <a:lstStyle/>
+                    <a:p>
+                      <a:r>
+                        <a:rPr sz="1100" b="0"/>
+                        <a:t>3</a:t>
+                      </a:r>
+                    </a:p>
+                  </a:txBody>
+                  <a:tcPr/>
+                </a:tc>
+                <a:tc>
+                  <a:txBody>
+                    <a:bodyPr/>
+                    <a:lstStyle/>
+                    <a:p>
+                      <a:r>
+                        <a:rPr sz="1100" b="0"/>
+                        <a:t>9</a:t>
+                      </a:r>
+                    </a:p>
+                  </a:txBody>
+                  <a:tcPr/>
+                </a:tc>
+                <a:tc>
+                  <a:txBody>
+                    <a:bodyPr/>
+                    <a:lstStyle/>
+                    <a:p>
+                      <a:r>
+                        <a:rPr sz="1100" b="0"/>
+                        <a:t>6</a:t>
+                      </a:r>
+                    </a:p>
+                  </a:txBody>
+                  <a:tcPr/>
+                </a:tc>
+                <a:tc>
+                  <a:txBody>
+                    <a:bodyPr/>
+                    <a:lstStyle/>
+                    <a:p>
+                      <a:r>
+                        <a:rPr sz="1100" b="0"/>
+                        <a:t>0</a:t>
+                      </a:r>
+                    </a:p>
+                  </a:txBody>
+                  <a:tcPr/>
+                </a:tc>
+                <a:tc>
+                  <a:txBody>
+                    <a:bodyPr/>
+                    <a:lstStyle/>
+                    <a:p>
+                      <a:r>
+                        <a:rPr sz="1100" b="0"/>
+                        <a:t>3-dim DFS = 3 sectors</a:t>
+                      </a:r>
+                    </a:p>
+                  </a:txBody>
+                  <a:tcPr/>
+                </a:tc>
+              </a:tr>
+              <a:tr h="328041">
+                <a:tc>
+                  <a:txBody>
+                    <a:bodyPr/>
+                    <a:lstStyle/>
+                    <a:p>
+                      <a:r>
+                        <a:rPr sz="1100" b="0"/>
+                        <a:t>158</a:t>
+                      </a:r>
+                    </a:p>
+                  </a:txBody>
+                  <a:tcPr/>
+                </a:tc>
+                <a:tc>
+                  <a:txBody>
+                    <a:bodyPr/>
+                    <a:lstStyle/>
+                    <a:p>
+                      <a:r>
+                        <a:rPr sz="1100" b="0"/>
+                        <a:t>(I, E, V, I)</a:t>
+                      </a:r>
+                    </a:p>
+                  </a:txBody>
+                  <a:tcPr/>
+                </a:tc>
+                <a:tc>
+                  <a:txBody>
+                    <a:bodyPr/>
+                    <a:lstStyle/>
+                    <a:p>
+                      <a:r>
+                        <a:rPr sz="1100" b="0"/>
+                        <a:t>3</a:t>
+                      </a:r>
+                    </a:p>
+                  </a:txBody>
+                  <a:tcPr/>
+                </a:tc>
+                <a:tc>
+                  <a:txBody>
+                    <a:bodyPr/>
+                    <a:lstStyle/>
+                    <a:p>
+                      <a:r>
+                        <a:rPr sz="1100" b="0"/>
+                        <a:t>15</a:t>
+                      </a:r>
+                    </a:p>
+                  </a:txBody>
+                  <a:tcPr/>
+                </a:tc>
+                <a:tc>
+                  <a:txBody>
+                    <a:bodyPr/>
+                    <a:lstStyle/>
+                    <a:p>
+                      <a:r>
+                        <a:rPr sz="1100" b="0"/>
+                        <a:t>12</a:t>
+                      </a:r>
+                    </a:p>
+                  </a:txBody>
+                  <a:tcPr/>
+                </a:tc>
+                <a:tc>
+                  <a:txBody>
+                    <a:bodyPr/>
+                    <a:lstStyle/>
+                    <a:p>
+                      <a:r>
+                        <a:rPr sz="1100" b="0"/>
+                        <a:t>8</a:t>
+                      </a:r>
+                    </a:p>
+                  </a:txBody>
+                  <a:tcPr/>
+                </a:tc>
+                <a:tc>
+                  <a:txBody>
+                    <a:bodyPr/>
+                    <a:lstStyle/>
+                    <a:p>
+                      <a:r>
+                        <a:rPr sz="1100" b="0"/>
+                        <a:t>DFS + dark states</a:t>
+                      </a:r>
+                    </a:p>
+                  </a:txBody>
+                  <a:tcPr/>
+                </a:tc>
+              </a:tr>
+              <a:tr h="328041">
+                <a:tc>
+                  <a:txBody>
+                    <a:bodyPr/>
+                    <a:lstStyle/>
+                    <a:p>
+                      <a:r>
+                        <a:rPr sz="1100" b="0"/>
+                        <a:t>214</a:t>
+                      </a:r>
+                    </a:p>
+                  </a:txBody>
+                  <a:tcPr/>
+                </a:tc>
+                <a:tc>
+                  <a:txBody>
+                    <a:bodyPr/>
+                    <a:lstStyle/>
+                    <a:p>
+                      <a:r>
+                        <a:rPr sz="1100" b="0"/>
+                        <a:t>(I, V, E, I)</a:t>
+                      </a:r>
+                    </a:p>
+                  </a:txBody>
+                  <a:tcPr/>
+                </a:tc>
+                <a:tc>
+                  <a:txBody>
+                    <a:bodyPr/>
+                    <a:lstStyle/>
+                    <a:p>
+                      <a:r>
+                        <a:rPr sz="1100" b="0"/>
+                        <a:t>3</a:t>
+                      </a:r>
+                    </a:p>
+                  </a:txBody>
+                  <a:tcPr/>
+                </a:tc>
+                <a:tc>
+                  <a:txBody>
+                    <a:bodyPr/>
+                    <a:lstStyle/>
+                    <a:p>
+                      <a:r>
+                        <a:rPr sz="1100" b="0"/>
+                        <a:t>15</a:t>
+                      </a:r>
+                    </a:p>
+                  </a:txBody>
+                  <a:tcPr/>
+                </a:tc>
+                <a:tc>
+                  <a:txBody>
+                    <a:bodyPr/>
+                    <a:lstStyle/>
+                    <a:p>
+                      <a:r>
+                        <a:rPr sz="1100" b="0"/>
+                        <a:t>12</a:t>
+                      </a:r>
+                    </a:p>
+                  </a:txBody>
+                  <a:tcPr/>
+                </a:tc>
+                <a:tc>
+                  <a:txBody>
+                    <a:bodyPr/>
+                    <a:lstStyle/>
+                    <a:p>
+                      <a:r>
+                        <a:rPr sz="1100" b="0"/>
+                        <a:t>8</a:t>
+                      </a:r>
+                    </a:p>
+                  </a:txBody>
+                  <a:tcPr/>
+                </a:tc>
+                <a:tc>
+                  <a:txBody>
+                    <a:bodyPr/>
+                    <a:lstStyle/>
+                    <a:p>
+                      <a:r>
+                        <a:rPr sz="1100" b="0"/>
+                        <a:t>DFS + dark states</a:t>
+                      </a:r>
+                    </a:p>
+                  </a:txBody>
+                  <a:tcPr/>
+                </a:tc>
+              </a:tr>
+              <a:tr h="328041">
+                <a:tc>
+                  <a:txBody>
+                    <a:bodyPr/>
+                    <a:lstStyle/>
+                    <a:p>
+                      <a:r>
+                        <a:rPr sz="1100" b="0"/>
+                        <a:t>22</a:t>
+                      </a:r>
+                    </a:p>
+                  </a:txBody>
+                  <a:tcPr/>
+                </a:tc>
+                <a:tc>
+                  <a:txBody>
+                    <a:bodyPr/>
+                    <a:lstStyle/>
+                    <a:p>
+                      <a:r>
+                        <a:rPr sz="1100" b="0"/>
+                        <a:t>(I, V, V, D)</a:t>
+                      </a:r>
+                    </a:p>
+                  </a:txBody>
+                  <a:tcPr/>
+                </a:tc>
+                <a:tc>
+                  <a:txBody>
+                    <a:bodyPr/>
+                    <a:lstStyle/>
+                    <a:p>
+                      <a:r>
+                        <a:rPr sz="1100" b="0"/>
+                        <a:t>2</a:t>
+                      </a:r>
+                    </a:p>
+                  </a:txBody>
+                  <a:tcPr/>
+                </a:tc>
+                <a:tc>
+                  <a:txBody>
+                    <a:bodyPr/>
+                    <a:lstStyle/>
+                    <a:p>
+                      <a:r>
+                        <a:rPr sz="1100" b="0"/>
+                        <a:t>13</a:t>
+                      </a:r>
+                    </a:p>
+                  </a:txBody>
+                  <a:tcPr/>
+                </a:tc>
+                <a:tc>
+                  <a:txBody>
+                    <a:bodyPr/>
+                    <a:lstStyle/>
+                    <a:p>
+                      <a:r>
+                        <a:rPr sz="1100" b="0"/>
+                        <a:t>11</a:t>
+                      </a:r>
+                    </a:p>
+                  </a:txBody>
+                  <a:tcPr/>
+                </a:tc>
+                <a:tc>
+                  <a:txBody>
+                    <a:bodyPr/>
+                    <a:lstStyle/>
+                    <a:p>
+                      <a:r>
+                        <a:rPr sz="1100" b="0"/>
+                        <a:t>7</a:t>
+                      </a:r>
+                    </a:p>
+                  </a:txBody>
+                  <a:tcPr/>
+                </a:tc>
+                <a:tc>
+                  <a:txBody>
+                    <a:bodyPr/>
+                    <a:lstStyle/>
+                    <a:p>
+                      <a:r>
+                        <a:rPr sz="1100" b="0"/>
+                        <a:t>R-T11 rule: vacuum + same QLC</a:t>
+                      </a:r>
+                    </a:p>
+                  </a:txBody>
+                  <a:tcPr/>
+                </a:tc>
+              </a:tr>
+              <a:tr h="328041">
+                <a:tc>
+                  <a:txBody>
+                    <a:bodyPr/>
+                    <a:lstStyle/>
+                    <a:p>
+                      <a:r>
+                        <a:rPr sz="1100" b="0"/>
+                        <a:t>182</a:t>
+                      </a:r>
+                    </a:p>
+                  </a:txBody>
+                  <a:tcPr/>
+                </a:tc>
+                <a:tc>
+                  <a:txBody>
+                    <a:bodyPr/>
+                    <a:lstStyle/>
+                    <a:p>
+                      <a:r>
+                        <a:rPr sz="1100" b="0"/>
+                        <a:t>(I, V, V, E)</a:t>
+                      </a:r>
+                    </a:p>
+                  </a:txBody>
+                  <a:tcPr/>
+                </a:tc>
+                <a:tc>
+                  <a:txBody>
+                    <a:bodyPr/>
+                    <a:lstStyle/>
+                    <a:p>
+                      <a:r>
+                        <a:rPr sz="1100" b="0"/>
+                        <a:t>2</a:t>
+                      </a:r>
+                    </a:p>
+                  </a:txBody>
+                  <a:tcPr/>
+                </a:tc>
+                <a:tc>
+                  <a:txBody>
+                    <a:bodyPr/>
+                    <a:lstStyle/>
+                    <a:p>
+                      <a:r>
+                        <a:rPr sz="1100" b="0"/>
+                        <a:t>17</a:t>
+                      </a:r>
+                    </a:p>
+                  </a:txBody>
+                  <a:tcPr/>
+                </a:tc>
+                <a:tc>
+                  <a:txBody>
+                    <a:bodyPr/>
+                    <a:lstStyle/>
+                    <a:p>
+                      <a:r>
+                        <a:rPr sz="1100" b="0"/>
+                        <a:t>15</a:t>
+                      </a:r>
+                    </a:p>
+                  </a:txBody>
+                  <a:tcPr/>
+                </a:tc>
+                <a:tc>
+                  <a:txBody>
+                    <a:bodyPr/>
+                    <a:lstStyle/>
+                    <a:p>
+                      <a:r>
+                        <a:rPr sz="1100" b="0"/>
+                        <a:t>4</a:t>
+                      </a:r>
+                    </a:p>
+                  </a:txBody>
+                  <a:tcPr/>
+                </a:tc>
+                <a:tc>
+                  <a:txBody>
+                    <a:bodyPr/>
+                    <a:lstStyle/>
+                    <a:p>
+                      <a:r>
+                        <a:rPr sz="1100" b="0"/>
+                        <a:t>vacuum + a 10-state QLC</a:t>
+                      </a:r>
+                    </a:p>
+                  </a:txBody>
+                  <a:tcPr/>
+                </a:tc>
+              </a:tr>
+            </a:tbl>
+          </a:graphicData>
+        </a:graphic>
+      </p:graphicFrame>
+      <p:sp>
+        <p:nvSpPr>
+          <p:cNvPr id="4" name="TextBox 3"/>
+          <p:cNvSpPr txBox="1"/>
+          <p:nvPr/>
+        </p:nvSpPr>
+        <p:spPr>
+          <a:xfrm>
+            <a:off x="548640" y="6035040"/>
+            <a:ext cx="11064240" cy="640080"/>
+          </a:xfrm>
+          <a:prstGeom prst="rect">
+            <a:avLst/>
+          </a:prstGeom>
+          <a:noFill/>
+        </p:spPr>
+        <p:txBody>
+          <a:bodyPr wrap="square">
+            <a:spAutoFit/>
+          </a:bodyPr>
+          <a:lstStyle/>
+          <a:p>
+            <a:r>
+              <a:rPr sz="1200"/>
+              <a:t>N = 4, obc0; all entries exact over ℚ(√2).  Note the W22 row: the rule whose transient dark states forced the Tier-2 gap definition to be corrected — is C150 with a single symbol changed.  The two middle-slot D-mutations preserve the sector count exactly; the E-mutations add transient dark states on top.</a:t>
+            </a:r>
+          </a:p>
+        </p:txBody>
+      </p:sp>
+    </p:spTree>
+  </p:cSld>
+  <p:clrMapOvr>
+    <a:masterClrMapping/>
+  </p:clrMapOvr>
+</p:sld>
+</file>
+
+<file path=ppt/slides/slide28.xml><?xml version="1.0" encoding="utf-8"?>
+<p:sld xmlns:a="http://schemas.openxmlformats.org/drawingml/2006/main" xmlns:p="http://schemas.openxmlformats.org/presentationml/2006/main" xmlns:r="http://schemas.openxmlformats.org/officeDocument/2006/relationships">
+  <p:cSld>
+    <p:spTree>
+      <p:nvGrpSpPr>
+        <p:cNvPr id="1" name=""/>
+        <p:cNvGrpSpPr/>
+        <p:nvPr/>
+      </p:nvGrpSpPr>
+      <p:grpSpPr/>
+      <p:sp>
+        <p:nvSpPr>
+          <p:cNvPr id="2" name="Title 1"/>
+          <p:cNvSpPr>
+            <a:spLocks noGrp="1"/>
+          </p:cNvSpPr>
+          <p:nvPr>
+            <p:ph type="title"/>
+          </p:nvPr>
+        </p:nvSpPr>
+        <p:spPr/>
+        <p:txBody>
+          <a:bodyPr/>
+          <a:lstStyle/>
+          <a:p>
+            <a:r>
+              <a:rPr sz="2600"/>
+              <a:t>The sectors survive dissipation as a DFS</a:t>
+            </a:r>
+          </a:p>
+        </p:txBody>
+      </p:sp>
+      <p:sp>
+        <p:nvSpPr>
+          <p:cNvPr id="3" name="Content Placeholder 2"/>
+          <p:cNvSpPr>
+            <a:spLocks noGrp="1"/>
+          </p:cNvSpPr>
+          <p:nvPr>
+            <p:ph idx="1"/>
+          </p:nvPr>
+        </p:nvSpPr>
+        <p:spPr>
+          <a:xfrm>
+            <a:off x="548640" y="1417320"/>
+            <a:ext cx="11064240" cy="5029200"/>
+          </a:xfrm>
+        </p:spPr>
+        <p:txBody>
+          <a:bodyPr wrap="square"/>
+          <a:lstStyle/>
+          <a:p>
+            <a:pPr/>
+            <a:r>
+              <a:rPr sz="1800" b="1"/>
+              <a:t>W148 = (I, D, V, I) and W134 = (I, V, D, I): each C150 sector collapses to ONE pointer state, and every coherence between them survives</a:t>
+            </a:r>
+          </a:p>
+          <a:p>
+            <a:pPr lvl="1"/>
+            <a:r>
+              <a:rPr sz="1600" b="0"/>
+              <a:t>exact block dimension [n] with n = ⌊(N+1)/2⌋ + 1 = the C150 sector count, verified N = 3…7 for both rules; gap = n(n−1)</a:t>
+            </a:r>
+          </a:p>
+          <a:p>
+            <a:pPr lvl="1"/>
+            <a:r>
+              <a:rPr sz="1600" b="0"/>
+              <a:t>N = 3,4 → 3-dim (gap 6);  N = 5,6 → 4-dim (gap 12);  N = 7 → 5-dim (gap 20)</a:t>
+            </a:r>
+          </a:p>
+          <a:p>
+            <a:pPr/>
+            <a:r>
+              <a:rPr sz="1800" b="1"/>
+              <a:t>Explicit, at N = 5:  DFS = span{ |00000⟩, |10000⟩, |10100⟩, |10101⟩ }</a:t>
+            </a:r>
+          </a:p>
+          <a:p>
+            <a:pPr lvl="1"/>
+            <a:r>
+              <a:rPr sz="1600" b="0"/>
+              <a:t>one maximally packed representative per wall number w = 0, 2, 4, 6 — left-packed for W148, right-packed for W134, the two being boundary mirror images. The dissipation picks a canonical member of each C150 sector and keeps the coherence between them</a:t>
+            </a:r>
+          </a:p>
+          <a:p>
+            <a:pPr/>
+            <a:r>
+              <a:rPr sz="1800" b="1"/>
+              <a:t>Reading: the wall charge becomes an error-protecting charge</a:t>
+            </a:r>
+          </a:p>
+          <a:p>
+            <a:pPr lvl="1"/>
+            <a:r>
+              <a:rPr sz="1600" b="0"/>
+              <a:t>a logical qudit of dimension ⌊(N+1)/2⌋+1, growing LINEARLY in N, protected passively — no gates, no syndrome extraction</a:t>
+            </a:r>
+          </a:p>
+          <a:p>
+            <a:pPr lvl="1"/>
+            <a:r>
+              <a:rPr sz="1600" b="0"/>
+              <a:t>same mechanism as W232 in Tier-2's QEC chapter (R-T12; cf. Guedes, Winter &amp; Müller, arXiv:2309.03608): a classical CA charge promoted to a dissipative code space</a:t>
+            </a:r>
+          </a:p>
+          <a:p>
+            <a:pPr lvl="1"/>
+            <a:r>
+              <a:rPr sz="1600" b="0"/>
+              <a:t>caveat: this is protection against the automaton's OWN dissipation. No threshold against extrinsic noise has been computed — that is the next test.</a:t>
+            </a:r>
+          </a:p>
+        </p:txBody>
+      </p:sp>
+    </p:spTree>
+  </p:cSld>
+  <p:clrMapOvr>
+    <a:masterClrMapping/>
+  </p:clrMapOvr>
+</p:sld>
+</file>
+
+<file path=ppt/slides/slide29.xml><?xml version="1.0" encoding="utf-8"?>
+<p:sld xmlns:a="http://schemas.openxmlformats.org/drawingml/2006/main" xmlns:p="http://schemas.openxmlformats.org/presentationml/2006/main" xmlns:r="http://schemas.openxmlformats.org/officeDocument/2006/relationships">
+  <p:cSld>
+    <p:spTree>
+      <p:nvGrpSpPr>
+        <p:cNvPr id="1" name=""/>
+        <p:cNvGrpSpPr/>
+        <p:nvPr/>
+      </p:nvGrpSpPr>
+      <p:grpSpPr/>
+      <p:sp>
+        <p:nvSpPr>
+          <p:cNvPr id="2" name="Title 1"/>
+          <p:cNvSpPr>
+            <a:spLocks noGrp="1"/>
+          </p:cNvSpPr>
+          <p:nvPr>
+            <p:ph type="title"/>
+          </p:nvPr>
+        </p:nvSpPr>
+        <p:spPr/>
+        <p:txBody>
+          <a:bodyPr/>
+          <a:lstStyle/>
+          <a:p>
+            <a:r>
+              <a:rPr sz="2600"/>
+              <a:t>The ring, and the updated open list</a:t>
+            </a:r>
+          </a:p>
+        </p:txBody>
+      </p:sp>
+      <p:sp>
+        <p:nvSpPr>
+          <p:cNvPr id="3" name="Content Placeholder 2"/>
+          <p:cNvSpPr>
+            <a:spLocks noGrp="1"/>
+          </p:cNvSpPr>
+          <p:nvPr>
+            <p:ph idx="1"/>
+          </p:nvPr>
+        </p:nvSpPr>
+        <p:spPr>
+          <a:xfrm>
+            <a:off x="548640" y="1417320"/>
+            <a:ext cx="11064240" cy="5029200"/>
+          </a:xfrm>
+        </p:spPr>
+        <p:txBody>
+          <a:bodyPr wrap="square"/>
+          <a:lstStyle/>
+          <a:p>
+            <a:pPr/>
+            <a:r>
+              <a:rPr sz="1800" b="1"/>
+              <a:t>C150 on pbc — kinematics in closed form (Tier-2 SCC engine, N = 3…12)</a:t>
+            </a:r>
+          </a:p>
+          <a:p>
+            <a:pPr lvl="1"/>
+            <a:r>
+              <a:rPr sz="1600" b="0"/>
+              <a:t>|S_w| = 2·C(N, w) for even w with 0 &lt; w &lt; N; the factor 2 IS the Z₂ gauge redundancy — the two spin states of a bond string are the global flip</a:t>
+            </a:r>
+          </a:p>
+          <a:p>
+            <a:pPr lvl="1"/>
+            <a:r>
+              <a:rPr sz="1600" b="0"/>
+              <a:t>w = 0 gives two frozen singletons (all-0, all-1); for even N, w = N gives two more (the two Néel states)</a:t>
+            </a:r>
+          </a:p>
+          <a:p>
+            <a:pPr lvl="1"/>
+            <a:r>
+              <a:rPr sz="1600" b="0"/>
+              <a:t>#sectors = N/2 + 3 (even N),  (N+3)/2 (odd N) — checked N = 3…12</a:t>
+            </a:r>
+          </a:p>
+          <a:p>
+            <a:pPr/>
+            <a:r>
+              <a:rPr sz="1800" b="1"/>
+              <a:t>Closed by this chapter</a:t>
+            </a:r>
+          </a:p>
+          <a:p>
+            <a:pPr lvl="1"/>
+            <a:r>
+              <a:rPr sz="1600" b="0"/>
+              <a:t>the commutant dimension (6^m), and its (√6)^N growth</a:t>
+            </a:r>
+          </a:p>
+          <a:p>
+            <a:pPr lvl="1"/>
+            <a:r>
+              <a:rPr sz="1600" b="0"/>
+              <a:t>the 3^m law, dim Fix(U) = 2^m and dim Fix(U_w) = C(m, w/2) — all three now follow from one factorisation</a:t>
+            </a:r>
+          </a:p>
+          <a:p>
+            <a:pPr/>
+            <a:r>
+              <a:rPr sz="1800" b="1"/>
+              <a:t>Still open</a:t>
+            </a:r>
+          </a:p>
+          <a:p>
+            <a:pPr lvl="1"/>
+            <a:r>
+              <a:rPr sz="1600" b="0"/>
+              <a:t>the explicit mode operators; the partner-shell intertwiner; whether the odd-N second defect ¾ has a boundary interpretation</a:t>
+            </a:r>
+          </a:p>
+          <a:p>
+            <a:pPr lvl="1"/>
+            <a:r>
+              <a:rPr sz="1600" b="0"/>
+              <a:t>does the W148/W134 DFS dimension keep tracking ⌊(N+1)/2⌋+1 beyond N = 7, and does it hold on the ring?</a:t>
+            </a:r>
+          </a:p>
+          <a:p>
+            <a:pPr lvl="1"/>
+            <a:r>
+              <a:rPr sz="1600" b="0"/>
+              <a:t>extrinsic-noise threshold for the inherited code — connects this deck to the QEC literature</a:t>
             </a:r>
           </a:p>
         </p:txBody>
